--- a/dist/초3/수학/자연수계산/초3_수학_자연수계산_05_두자리수×한자리수_학생용.pptx
+++ b/dist/초3/수학/자연수계산/초3_수학_자연수계산_05_두자리수×한자리수_학생용.pptx
@@ -120,13 +120,13 @@
   <p:extLst>
     <p:ext uri="{521415D9-36F7-43E2-AB2F-B90AF26B5E84}">
       <p14:sectionLst xmlns:p14="http://schemas.microsoft.com/office/powerpoint/2010/main">
-        <p14:section name="도입" id="{e42a73c4-b818-f3e0-a133-e2b207789549}">
+        <p14:section name="도입" id="{149a1f21-6d3f-ac35-80b6-3f18a1115f43}">
           <p14:sldIdLst>
             <p14:sldId id="256"/>
             <p14:sldId id="257"/>
           </p14:sldIdLst>
         </p14:section>
-        <p14:section name="개념" id="{c2237de1-b743-94e4-4161-637ba93b2764}">
+        <p14:section name="개념" id="{dd4a9b0d-a021-3002-10dd-ca7124875298}">
           <p14:sldIdLst>
             <p14:sldId id="258"/>
             <p14:sldId id="259"/>
@@ -136,30 +136,30 @@
             <p14:sldId id="264"/>
           </p14:sldIdLst>
         </p14:section>
-        <p14:section name="연습" id="{b5f282b2-6bc5-0caf-21ca-17501b92fe85}">
+        <p14:section name="연습" id="{a9230a8d-d4f9-d1ce-fa3a-b4e77713c60b}">
           <p14:sldIdLst>
             <p14:sldId id="262"/>
             <p14:sldId id="265"/>
           </p14:sldIdLst>
         </p14:section>
-        <p14:section name="개념" id="{2b80d33b-83e2-3d62-6470-2935b29603f6}">
+        <p14:section name="개념" id="{144952fe-a817-8445-950e-090b5bd3c014}">
           <p14:sldIdLst/>
         </p14:section>
-        <p14:section name="연습" id="{40eec163-1d62-f4f6-2cc7-13221e197a36}">
+        <p14:section name="연습" id="{0e19595d-01a3-55f1-504e-84206f7e6a2a}">
           <p14:sldIdLst/>
         </p14:section>
-        <p14:section name="확인" id="{649bea85-ebc5-6deb-50f1-0002fbfbdf55}">
+        <p14:section name="확인" id="{a6f2683f-e3e0-2c56-4009-72116da43814}">
           <p14:sldIdLst>
             <p14:sldId id="266"/>
             <p14:sldId id="267"/>
           </p14:sldIdLst>
         </p14:section>
-        <p14:section name="정리" id="{0000201e-0b24-0d18-4234-8c2de8b276cf}">
+        <p14:section name="정리" id="{f7a7a7a8-50bb-0e0c-9797-91dbae63262f}">
           <p14:sldIdLst>
             <p14:sldId id="268"/>
           </p14:sldIdLst>
         </p14:section>
-        <p14:section name="보충" id="{2deb0f8b-99e1-ac4f-dc1f-fe395c968e60}">
+        <p14:section name="보충" id="{8fe36082-4efe-1fa8-6184-087017baa307}">
           <p14:sldIdLst>
             <p14:sldId id="269"/>
           </p14:sldIdLst>
@@ -2865,7 +2865,7 @@
           </p:nvPr>
         </p:nvGraphicFramePr>
         <p:xfrm>
-          <a:off x="8001000" y="883920"/>
+          <a:off x="8001000" y="922020"/>
           <a:ext cx="3291840" cy="914400"/>
         </p:xfrm>
         <a:graphic>
@@ -2877,7 +2877,7 @@
                 <a:gridCol w="1097280"/>
                 <a:gridCol w="1097280"/>
               </a:tblGrid>
-              <a:tr h="609600">
+              <a:tr h="590550">
                 <a:tc>
                   <a:txBody>
                     <a:bodyPr/>
@@ -3072,7 +3072,7 @@
                   </a:tcPr>
                 </a:tc>
               </a:tr>
-              <a:tr h="609600">
+              <a:tr h="590550">
                 <a:tc>
                   <a:txBody>
                     <a:bodyPr/>
@@ -3267,7 +3267,7 @@
                   </a:tcPr>
                 </a:tc>
               </a:tr>
-              <a:tr h="609600">
+              <a:tr h="590550">
                 <a:tc>
                   <a:txBody>
                     <a:bodyPr/>
@@ -3462,7 +3462,7 @@
                   </a:tcPr>
                 </a:tc>
               </a:tr>
-              <a:tr h="609600">
+              <a:tr h="590550">
                 <a:tc>
                   <a:txBody>
                     <a:bodyPr/>
@@ -11591,7 +11591,7 @@
           </p:nvPr>
         </p:nvGraphicFramePr>
         <p:xfrm>
-          <a:off x="8093629" y="2103120"/>
+          <a:off x="8093629" y="2030730"/>
           <a:ext cx="3017520" cy="914400"/>
         </p:xfrm>
         <a:graphic>
@@ -11603,7 +11603,7 @@
                 <a:gridCol w="1005840"/>
                 <a:gridCol w="1005840"/>
               </a:tblGrid>
-              <a:tr h="487680">
+              <a:tr h="511810">
                 <a:tc>
                   <a:txBody>
                     <a:bodyPr/>
@@ -11612,7 +11612,7 @@
                       <a:pPr eaLnBrk="0" algn="ctr" indent="0" marL="0">
                         <a:buNone/>
                       </a:pPr>
-                      <a:endParaRPr lang="en-US" sz="2400" dirty="0">
+                      <a:endParaRPr lang="en-US" sz="2600" dirty="0">
                         <a:latin typeface="맑은 고딕" charset="0"/>
                         <a:ea typeface="맑은 고딕" charset="0"/>
                         <a:cs typeface="맑은 고딕" charset="0"/>
@@ -11670,7 +11670,7 @@
                         <a:buNone/>
                       </a:pPr>
                       <a:r>
-                        <a:rPr lang="en-US" sz="2400" b="1" dirty="0">
+                        <a:rPr lang="en-US" sz="2600" b="1" dirty="0">
                           <a:solidFill>
                             <a:srgbClr val="1F2937"/>
                           </a:solidFill>
@@ -11680,7 +11680,7 @@
                         </a:rPr>
                         <a:t>십</a:t>
                       </a:r>
-                      <a:endParaRPr lang="en-US" sz="2400" dirty="0">
+                      <a:endParaRPr lang="en-US" sz="2600" dirty="0">
                         <a:latin typeface="맑은 고딕" charset="0"/>
                         <a:ea typeface="맑은 고딕" charset="0"/>
                         <a:cs typeface="맑은 고딕" charset="0"/>
@@ -11738,7 +11738,7 @@
                         <a:buNone/>
                       </a:pPr>
                       <a:r>
-                        <a:rPr lang="en-US" sz="2400" b="1" dirty="0">
+                        <a:rPr lang="en-US" sz="2600" b="1" dirty="0">
                           <a:solidFill>
                             <a:srgbClr val="1F2937"/>
                           </a:solidFill>
@@ -11748,7 +11748,7 @@
                         </a:rPr>
                         <a:t>일</a:t>
                       </a:r>
-                      <a:endParaRPr lang="en-US" sz="2400" dirty="0">
+                      <a:endParaRPr lang="en-US" sz="2600" dirty="0">
                         <a:latin typeface="맑은 고딕" charset="0"/>
                         <a:ea typeface="맑은 고딕" charset="0"/>
                         <a:cs typeface="맑은 고딕" charset="0"/>
@@ -11798,7 +11798,7 @@
                   </a:tcPr>
                 </a:tc>
               </a:tr>
-              <a:tr h="487680">
+              <a:tr h="511810">
                 <a:tc>
                   <a:txBody>
                     <a:bodyPr/>
@@ -11807,7 +11807,7 @@
                       <a:pPr eaLnBrk="0" algn="ctr" indent="0" marL="0">
                         <a:buNone/>
                       </a:pPr>
-                      <a:endParaRPr lang="en-US" sz="2400" dirty="0">
+                      <a:endParaRPr lang="en-US" sz="2600" dirty="0">
                         <a:latin typeface="맑은 고딕" charset="0"/>
                         <a:ea typeface="맑은 고딕" charset="0"/>
                         <a:cs typeface="맑은 고딕" charset="0"/>
@@ -11865,7 +11865,7 @@
                         <a:buNone/>
                       </a:pPr>
                       <a:r>
-                        <a:rPr lang="en-US" sz="2400" dirty="0">
+                        <a:rPr lang="en-US" sz="2600" dirty="0">
                           <a:solidFill>
                             <a:srgbClr val="1F2937"/>
                           </a:solidFill>
@@ -11875,7 +11875,7 @@
                         </a:rPr>
                         <a:t>2</a:t>
                       </a:r>
-                      <a:endParaRPr lang="en-US" sz="2400" dirty="0">
+                      <a:endParaRPr lang="en-US" sz="2600" dirty="0">
                         <a:latin typeface="맑은 고딕" charset="0"/>
                         <a:ea typeface="맑은 고딕" charset="0"/>
                         <a:cs typeface="맑은 고딕" charset="0"/>
@@ -11933,7 +11933,7 @@
                         <a:buNone/>
                       </a:pPr>
                       <a:r>
-                        <a:rPr lang="en-US" sz="2400" dirty="0">
+                        <a:rPr lang="en-US" sz="2600" dirty="0">
                           <a:solidFill>
                             <a:srgbClr val="1F2937"/>
                           </a:solidFill>
@@ -11943,7 +11943,7 @@
                         </a:rPr>
                         <a:t>6</a:t>
                       </a:r>
-                      <a:endParaRPr lang="en-US" sz="2400" dirty="0">
+                      <a:endParaRPr lang="en-US" sz="2600" dirty="0">
                         <a:latin typeface="맑은 고딕" charset="0"/>
                         <a:ea typeface="맑은 고딕" charset="0"/>
                         <a:cs typeface="맑은 고딕" charset="0"/>
@@ -11993,7 +11993,7 @@
                   </a:tcPr>
                 </a:tc>
               </a:tr>
-              <a:tr h="487680">
+              <a:tr h="511810">
                 <a:tc>
                   <a:txBody>
                     <a:bodyPr/>
@@ -12003,7 +12003,7 @@
                         <a:buNone/>
                       </a:pPr>
                       <a:r>
-                        <a:rPr lang="en-US" sz="2400" dirty="0">
+                        <a:rPr lang="en-US" sz="2600" dirty="0">
                           <a:solidFill>
                             <a:srgbClr val="1F2937"/>
                           </a:solidFill>
@@ -12013,7 +12013,7 @@
                         </a:rPr>
                         <a:t>×</a:t>
                       </a:r>
-                      <a:endParaRPr lang="en-US" sz="2400" dirty="0">
+                      <a:endParaRPr lang="en-US" sz="2600" dirty="0">
                         <a:latin typeface="맑은 고딕" charset="0"/>
                         <a:ea typeface="맑은 고딕" charset="0"/>
                         <a:cs typeface="맑은 고딕" charset="0"/>
@@ -12070,7 +12070,7 @@
                       <a:pPr eaLnBrk="0" algn="ctr" indent="0" marL="0">
                         <a:buNone/>
                       </a:pPr>
-                      <a:endParaRPr lang="en-US" sz="2400" dirty="0">
+                      <a:endParaRPr lang="en-US" sz="2600" dirty="0">
                         <a:latin typeface="맑은 고딕" charset="0"/>
                         <a:ea typeface="맑은 고딕" charset="0"/>
                         <a:cs typeface="맑은 고딕" charset="0"/>
@@ -12128,7 +12128,7 @@
                         <a:buNone/>
                       </a:pPr>
                       <a:r>
-                        <a:rPr lang="en-US" sz="2400" dirty="0">
+                        <a:rPr lang="en-US" sz="2600" dirty="0">
                           <a:solidFill>
                             <a:srgbClr val="1F2937"/>
                           </a:solidFill>
@@ -12138,7 +12138,7 @@
                         </a:rPr>
                         <a:t>3</a:t>
                       </a:r>
-                      <a:endParaRPr lang="en-US" sz="2400" dirty="0">
+                      <a:endParaRPr lang="en-US" sz="2600" dirty="0">
                         <a:latin typeface="맑은 고딕" charset="0"/>
                         <a:ea typeface="맑은 고딕" charset="0"/>
                         <a:cs typeface="맑은 고딕" charset="0"/>
@@ -12188,7 +12188,7 @@
                   </a:tcPr>
                 </a:tc>
               </a:tr>
-              <a:tr h="487680">
+              <a:tr h="511810">
                 <a:tc>
                   <a:txBody>
                     <a:bodyPr/>
@@ -12197,7 +12197,7 @@
                       <a:pPr eaLnBrk="0" algn="ctr" indent="0" marL="0">
                         <a:buNone/>
                       </a:pPr>
-                      <a:endParaRPr lang="en-US" sz="2400" dirty="0">
+                      <a:endParaRPr lang="en-US" sz="2600" dirty="0">
                         <a:latin typeface="맑은 고딕" charset="0"/>
                         <a:ea typeface="맑은 고딕" charset="0"/>
                         <a:cs typeface="맑은 고딕" charset="0"/>
@@ -12255,7 +12255,7 @@
                         <a:buNone/>
                       </a:pPr>
                       <a:r>
-                        <a:rPr lang="en-US" sz="2400" dirty="0">
+                        <a:rPr lang="en-US" sz="2600" dirty="0">
                           <a:solidFill>
                             <a:srgbClr val="1F2937"/>
                           </a:solidFill>
@@ -12265,7 +12265,7 @@
                         </a:rPr>
                         <a:t>1</a:t>
                       </a:r>
-                      <a:endParaRPr lang="en-US" sz="2400" dirty="0">
+                      <a:endParaRPr lang="en-US" sz="2600" dirty="0">
                         <a:latin typeface="맑은 고딕" charset="0"/>
                         <a:ea typeface="맑은 고딕" charset="0"/>
                         <a:cs typeface="맑은 고딕" charset="0"/>
@@ -12323,7 +12323,7 @@
                         <a:buNone/>
                       </a:pPr>
                       <a:r>
-                        <a:rPr lang="en-US" sz="2400" dirty="0">
+                        <a:rPr lang="en-US" sz="2600" dirty="0">
                           <a:solidFill>
                             <a:srgbClr val="1F2937"/>
                           </a:solidFill>
@@ -12333,7 +12333,7 @@
                         </a:rPr>
                         <a:t>8</a:t>
                       </a:r>
-                      <a:endParaRPr lang="en-US" sz="2400" dirty="0">
+                      <a:endParaRPr lang="en-US" sz="2600" dirty="0">
                         <a:latin typeface="맑은 고딕" charset="0"/>
                         <a:ea typeface="맑은 고딕" charset="0"/>
                         <a:cs typeface="맑은 고딕" charset="0"/>
@@ -12383,7 +12383,7 @@
                   </a:tcPr>
                 </a:tc>
               </a:tr>
-              <a:tr h="487680">
+              <a:tr h="511810">
                 <a:tc>
                   <a:txBody>
                     <a:bodyPr/>
@@ -12392,7 +12392,7 @@
                       <a:pPr eaLnBrk="0" algn="ctr" indent="0" marL="0">
                         <a:buNone/>
                       </a:pPr>
-                      <a:endParaRPr lang="en-US" sz="2400" dirty="0">
+                      <a:endParaRPr lang="en-US" sz="2600" dirty="0">
                         <a:latin typeface="맑은 고딕" charset="0"/>
                         <a:ea typeface="맑은 고딕" charset="0"/>
                         <a:cs typeface="맑은 고딕" charset="0"/>
@@ -12450,7 +12450,7 @@
                         <a:buNone/>
                       </a:pPr>
                       <a:r>
-                        <a:rPr lang="en-US" sz="2400" dirty="0">
+                        <a:rPr lang="en-US" sz="2600" dirty="0">
                           <a:solidFill>
                             <a:srgbClr val="1F2937"/>
                           </a:solidFill>
@@ -12460,7 +12460,7 @@
                         </a:rPr>
                         <a:t>6</a:t>
                       </a:r>
-                      <a:endParaRPr lang="en-US" sz="2400" dirty="0">
+                      <a:endParaRPr lang="en-US" sz="2600" dirty="0">
                         <a:latin typeface="맑은 고딕" charset="0"/>
                         <a:ea typeface="맑은 고딕" charset="0"/>
                         <a:cs typeface="맑은 고딕" charset="0"/>
@@ -12518,7 +12518,7 @@
                         <a:buNone/>
                       </a:pPr>
                       <a:r>
-                        <a:rPr lang="en-US" sz="2400" dirty="0">
+                        <a:rPr lang="en-US" sz="2600" dirty="0">
                           <a:solidFill>
                             <a:srgbClr val="1F2937"/>
                           </a:solidFill>
@@ -12528,7 +12528,7 @@
                         </a:rPr>
                         <a:t>0</a:t>
                       </a:r>
-                      <a:endParaRPr lang="en-US" sz="2400" dirty="0">
+                      <a:endParaRPr lang="en-US" sz="2600" dirty="0">
                         <a:latin typeface="맑은 고딕" charset="0"/>
                         <a:ea typeface="맑은 고딕" charset="0"/>
                         <a:cs typeface="맑은 고딕" charset="0"/>
@@ -12578,7 +12578,7 @@
                   </a:tcPr>
                 </a:tc>
               </a:tr>
-              <a:tr h="487680">
+              <a:tr h="511810">
                 <a:tc>
                   <a:txBody>
                     <a:bodyPr/>
@@ -12587,7 +12587,7 @@
                       <a:pPr eaLnBrk="0" algn="ctr" indent="0" marL="0">
                         <a:buNone/>
                       </a:pPr>
-                      <a:endParaRPr lang="en-US" sz="2400" dirty="0">
+                      <a:endParaRPr lang="en-US" sz="2600" dirty="0">
                         <a:latin typeface="맑은 고딕" charset="0"/>
                         <a:ea typeface="맑은 고딕" charset="0"/>
                         <a:cs typeface="맑은 고딕" charset="0"/>
@@ -12645,7 +12645,7 @@
                         <a:buNone/>
                       </a:pPr>
                       <a:r>
-                        <a:rPr lang="en-US" sz="2400" dirty="0">
+                        <a:rPr lang="en-US" sz="2600" dirty="0">
                           <a:solidFill>
                             <a:srgbClr val="1F2937"/>
                           </a:solidFill>
@@ -12655,7 +12655,7 @@
                         </a:rPr>
                         <a:t>7</a:t>
                       </a:r>
-                      <a:endParaRPr lang="en-US" sz="2400" dirty="0">
+                      <a:endParaRPr lang="en-US" sz="2600" dirty="0">
                         <a:latin typeface="맑은 고딕" charset="0"/>
                         <a:ea typeface="맑은 고딕" charset="0"/>
                         <a:cs typeface="맑은 고딕" charset="0"/>
@@ -12713,7 +12713,7 @@
                         <a:buNone/>
                       </a:pPr>
                       <a:r>
-                        <a:rPr lang="en-US" sz="2400" dirty="0">
+                        <a:rPr lang="en-US" sz="2600" dirty="0">
                           <a:solidFill>
                             <a:srgbClr val="1F2937"/>
                           </a:solidFill>
@@ -12723,7 +12723,7 @@
                         </a:rPr>
                         <a:t>8</a:t>
                       </a:r>
-                      <a:endParaRPr lang="en-US" sz="2400" dirty="0">
+                      <a:endParaRPr lang="en-US" sz="2600" dirty="0">
                         <a:latin typeface="맑은 고딕" charset="0"/>
                         <a:ea typeface="맑은 고딕" charset="0"/>
                         <a:cs typeface="맑은 고딕" charset="0"/>
@@ -13266,7 +13266,7 @@
           </p:nvPr>
         </p:nvGraphicFramePr>
         <p:xfrm>
-          <a:off x="8063728" y="2042160"/>
+          <a:off x="8063728" y="2089785"/>
           <a:ext cx="3291840" cy="914400"/>
         </p:xfrm>
         <a:graphic>
@@ -13278,7 +13278,7 @@
                 <a:gridCol w="1097280"/>
                 <a:gridCol w="1097280"/>
               </a:tblGrid>
-              <a:tr h="609600">
+              <a:tr h="590550">
                 <a:tc>
                   <a:txBody>
                     <a:bodyPr/>
@@ -13473,7 +13473,7 @@
                   </a:tcPr>
                 </a:tc>
               </a:tr>
-              <a:tr h="609600">
+              <a:tr h="590550">
                 <a:tc>
                   <a:txBody>
                     <a:bodyPr/>
@@ -13657,7 +13657,7 @@
                   </a:tcPr>
                 </a:tc>
               </a:tr>
-              <a:tr h="609600">
+              <a:tr h="590550">
                 <a:tc>
                   <a:txBody>
                     <a:bodyPr/>
@@ -13852,7 +13852,7 @@
                   </a:tcPr>
                 </a:tc>
               </a:tr>
-              <a:tr h="609600">
+              <a:tr h="590550">
                 <a:tc>
                   <a:txBody>
                     <a:bodyPr/>
@@ -14047,7 +14047,7 @@
                   </a:tcPr>
                 </a:tc>
               </a:tr>
-              <a:tr h="609600">
+              <a:tr h="590550">
                 <a:tc>
                   <a:txBody>
                     <a:bodyPr/>
@@ -14782,7 +14782,7 @@
           </p:nvPr>
         </p:nvGraphicFramePr>
         <p:xfrm>
-          <a:off x="7312914" y="2052320"/>
+          <a:off x="7312914" y="2096770"/>
           <a:ext cx="3291840" cy="914400"/>
         </p:xfrm>
         <a:graphic>
@@ -14794,7 +14794,7 @@
                 <a:gridCol w="1097280"/>
                 <a:gridCol w="1097280"/>
               </a:tblGrid>
-              <a:tr h="568960">
+              <a:tr h="551180">
                 <a:tc>
                   <a:txBody>
                     <a:bodyPr/>
@@ -14989,7 +14989,7 @@
                   </a:tcPr>
                 </a:tc>
               </a:tr>
-              <a:tr h="568960">
+              <a:tr h="551180">
                 <a:tc>
                   <a:txBody>
                     <a:bodyPr/>
@@ -15173,7 +15173,7 @@
                   </a:tcPr>
                 </a:tc>
               </a:tr>
-              <a:tr h="568960">
+              <a:tr h="551180">
                 <a:tc>
                   <a:txBody>
                     <a:bodyPr/>
@@ -15368,7 +15368,7 @@
                   </a:tcPr>
                 </a:tc>
               </a:tr>
-              <a:tr h="568960">
+              <a:tr h="551180">
                 <a:tc>
                   <a:txBody>
                     <a:bodyPr/>
@@ -15563,7 +15563,7 @@
                   </a:tcPr>
                 </a:tc>
               </a:tr>
-              <a:tr h="568960">
+              <a:tr h="551180">
                 <a:tc>
                   <a:txBody>
                     <a:bodyPr/>
@@ -16257,7 +16257,7 @@
           </p:nvPr>
         </p:nvGraphicFramePr>
         <p:xfrm>
-          <a:off x="7483450" y="2346960"/>
+          <a:off x="7483450" y="2385060"/>
           <a:ext cx="4023360" cy="914400"/>
         </p:xfrm>
         <a:graphic>
@@ -16270,7 +16270,7 @@
                 <a:gridCol w="1005840"/>
                 <a:gridCol w="1005840"/>
               </a:tblGrid>
-              <a:tr h="609600">
+              <a:tr h="590550">
                 <a:tc>
                   <a:txBody>
                     <a:bodyPr/>
@@ -16533,7 +16533,7 @@
                   </a:tcPr>
                 </a:tc>
               </a:tr>
-              <a:tr h="609600">
+              <a:tr h="590550">
                 <a:tc>
                   <a:txBody>
                     <a:bodyPr/>
@@ -16785,7 +16785,7 @@
                   </a:tcPr>
                 </a:tc>
               </a:tr>
-              <a:tr h="609600">
+              <a:tr h="590550">
                 <a:tc>
                   <a:txBody>
                     <a:bodyPr/>
@@ -17037,7 +17037,7 @@
                   </a:tcPr>
                 </a:tc>
               </a:tr>
-              <a:tr h="609600">
+              <a:tr h="590550">
                 <a:tc>
                   <a:txBody>
                     <a:bodyPr/>
@@ -17793,7 +17793,7 @@
           </p:nvPr>
         </p:nvGraphicFramePr>
         <p:xfrm>
-          <a:off x="7483450" y="2042160"/>
+          <a:off x="7483450" y="2089785"/>
           <a:ext cx="4023360" cy="914400"/>
         </p:xfrm>
         <a:graphic>
@@ -17806,7 +17806,7 @@
                 <a:gridCol w="1005840"/>
                 <a:gridCol w="1005840"/>
               </a:tblGrid>
-              <a:tr h="609600">
+              <a:tr h="590550">
                 <a:tc>
                   <a:txBody>
                     <a:bodyPr/>
@@ -18069,7 +18069,7 @@
                   </a:tcPr>
                 </a:tc>
               </a:tr>
-              <a:tr h="609600">
+              <a:tr h="590550">
                 <a:tc>
                   <a:txBody>
                     <a:bodyPr/>
@@ -18310,7 +18310,7 @@
                   </a:tcPr>
                 </a:tc>
               </a:tr>
-              <a:tr h="609600">
+              <a:tr h="590550">
                 <a:tc>
                   <a:txBody>
                     <a:bodyPr/>
@@ -18562,7 +18562,7 @@
                   </a:tcPr>
                 </a:tc>
               </a:tr>
-              <a:tr h="609600">
+              <a:tr h="590550">
                 <a:tc>
                   <a:txBody>
                     <a:bodyPr/>
@@ -18814,7 +18814,7 @@
                   </a:tcPr>
                 </a:tc>
               </a:tr>
-              <a:tr h="609600">
+              <a:tr h="590550">
                 <a:tc>
                   <a:txBody>
                     <a:bodyPr/>
